--- a/MSRC-ICM-Report.pptx
+++ b/MSRC-ICM-Report.pptx
@@ -5,7 +5,7 @@
     <p:sldMasterId id="2147483648" r:id="rId1"/>
   </p:sldMasterIdLst>
   <p:notesMasterIdLst>
-    <p:notesMasterId r:id="rId9"/>
+    <p:notesMasterId r:id="rId8"/>
   </p:notesMasterIdLst>
   <p:sldIdLst>
     <p:sldId id="256" r:id="rId2"/>
@@ -14,7 +14,6 @@
     <p:sldId id="259" r:id="rId5"/>
     <p:sldId id="260" r:id="rId6"/>
     <p:sldId id="262" r:id="rId7"/>
-    <p:sldId id="263" r:id="rId8"/>
   </p:sldIdLst>
   <p:sldSz cx="12192000" cy="6858000"/>
   <p:notesSz cx="6858000" cy="12192000"/>
@@ -729,90 +728,6 @@
             <a:fld id="{F7021451-1387-4CA6-816F-3879F97B5CBC}" type="slidenum">
               <a:rPr lang="en-US"/>
               <a:t>6</a:t>
-            </a:fld>
-            <a:endParaRPr lang="en-US"/>
-          </a:p>
-        </p:txBody>
-      </p:sp>
-    </p:spTree>
-    <p:extLst>
-      <p:ext uri="{BB962C8B-B14F-4D97-AF65-F5344CB8AC3E}">
-        <p14:creationId xmlns:p14="http://schemas.microsoft.com/office/powerpoint/2010/main" val="1024086991"/>
-      </p:ext>
-    </p:extLst>
-  </p:cSld>
-  <p:clrMapOvr>
-    <a:masterClrMapping/>
-  </p:clrMapOvr>
-</p:notes>
-</file>
-
-<file path=ppt/notesSlides/notesSlide7.xml><?xml version="1.0" encoding="utf-8"?>
-<p:notes xmlns:a="http://schemas.openxmlformats.org/drawingml/2006/main" xmlns:r="http://schemas.openxmlformats.org/officeDocument/2006/relationships" xmlns:p="http://schemas.openxmlformats.org/presentationml/2006/main">
-  <p:cSld>
-    <p:spTree>
-      <p:nvGrpSpPr>
-        <p:cNvPr id="1" name=""/>
-        <p:cNvGrpSpPr/>
-        <p:nvPr/>
-      </p:nvGrpSpPr>
-      <p:grpSpPr>
-        <a:xfrm>
-          <a:off x="0" y="0"/>
-          <a:ext cx="0" cy="0"/>
-          <a:chOff x="0" y="0"/>
-          <a:chExt cx="0" cy="0"/>
-        </a:xfrm>
-      </p:grpSpPr>
-      <p:sp>
-        <p:nvSpPr>
-          <p:cNvPr id="2" name="Slide Image Placeholder 1"/>
-          <p:cNvSpPr>
-            <a:spLocks noGrp="1" noRot="1" noChangeAspect="1"/>
-          </p:cNvSpPr>
-          <p:nvPr>
-            <p:ph type="sldImg"/>
-          </p:nvPr>
-        </p:nvSpPr>
-        <p:spPr/>
-      </p:sp>
-      <p:sp>
-        <p:nvSpPr>
-          <p:cNvPr id="3" name="Notes Placeholder 2"/>
-          <p:cNvSpPr>
-            <a:spLocks noGrp="1"/>
-          </p:cNvSpPr>
-          <p:nvPr>
-            <p:ph type="body" idx="1"/>
-          </p:nvPr>
-        </p:nvSpPr>
-        <p:spPr/>
-        <p:txBody>
-          <a:bodyPr/>
-          <a:lstStyle/>
-          <a:p>
-            <a:endParaRPr lang="en-US" dirty="0"/>
-          </a:p>
-        </p:txBody>
-      </p:sp>
-      <p:sp>
-        <p:nvSpPr>
-          <p:cNvPr id="4" name="Slide Number Placeholder 3"/>
-          <p:cNvSpPr>
-            <a:spLocks noGrp="1"/>
-          </p:cNvSpPr>
-          <p:nvPr>
-            <p:ph type="sldNum" sz="quarter" idx="10"/>
-          </p:nvPr>
-        </p:nvSpPr>
-        <p:spPr/>
-        <p:txBody>
-          <a:bodyPr/>
-          <a:lstStyle/>
-          <a:p>
-            <a:fld id="{F7021451-1387-4CA6-816F-3879F97B5CBC}" type="slidenum">
-              <a:rPr lang="en-US"/>
-              <a:t>7</a:t>
             </a:fld>
             <a:endParaRPr lang="en-US"/>
           </a:p>
@@ -1505,23 +1420,7 @@
                   <a:srgbClr val="333333"/>
                 </a:solidFill>
               </a:rPr>
-              <a:t>Tracking active MSRC security incidents (</a:t>
-            </a:r>
-            <a:r>
-              <a:rPr lang="en-US" sz="1600" b="1">
-                <a:solidFill>
-                  <a:srgbClr val="333333"/>
-                </a:solidFill>
-              </a:rPr>
-              <a:t>ICMs) </a:t>
-            </a:r>
-            <a:r>
-              <a:rPr lang="en-US" sz="1600" b="1" dirty="0">
-                <a:solidFill>
-                  <a:srgbClr val="333333"/>
-                </a:solidFill>
-              </a:rPr>
-              <a:t>is manual and error-prone.</a:t>
+              <a:t>Tracking active MSRC security incidents (ICMs) is manual and error-prone.</a:t>
             </a:r>
             <a:endParaRPr lang="en-US" sz="1600" dirty="0"/>
           </a:p>
@@ -4919,277 +4818,6 @@
               <a:t>Note: the Teams Chat column populates only for chats the running identity is a member of (WorkIQ).</a:t>
             </a:r>
             <a:endParaRPr lang="en-US" sz="1200" dirty="0"/>
-          </a:p>
-        </p:txBody>
-      </p:sp>
-    </p:spTree>
-  </p:cSld>
-  <p:clrMapOvr>
-    <a:masterClrMapping/>
-  </p:clrMapOvr>
-</p:sld>
-</file>
-
-<file path=ppt/slides/slide7.xml><?xml version="1.0" encoding="utf-8"?>
-<p:sld xmlns:a="http://schemas.openxmlformats.org/drawingml/2006/main" xmlns:r="http://schemas.openxmlformats.org/officeDocument/2006/relationships" xmlns:p="http://schemas.openxmlformats.org/presentationml/2006/main">
-  <p:cSld name="Slide 8">
-    <p:bg>
-      <p:bgPr>
-        <a:solidFill>
-          <a:srgbClr val="FFFFFF"/>
-        </a:solidFill>
-        <a:effectLst/>
-      </p:bgPr>
-    </p:bg>
-    <p:spTree>
-      <p:nvGrpSpPr>
-        <p:cNvPr id="1" name=""/>
-        <p:cNvGrpSpPr/>
-        <p:nvPr/>
-      </p:nvGrpSpPr>
-      <p:grpSpPr>
-        <a:xfrm>
-          <a:off x="0" y="0"/>
-          <a:ext cx="0" cy="0"/>
-          <a:chOff x="0" y="0"/>
-          <a:chExt cx="0" cy="0"/>
-        </a:xfrm>
-      </p:grpSpPr>
-      <p:sp>
-        <p:nvSpPr>
-          <p:cNvPr id="2" name="Shape 0"/>
-          <p:cNvSpPr/>
-          <p:nvPr/>
-        </p:nvSpPr>
-        <p:spPr>
-          <a:xfrm>
-            <a:off x="0" y="0"/>
-            <a:ext cx="12191695" cy="1051560"/>
-          </a:xfrm>
-          <a:prstGeom prst="rect">
-            <a:avLst/>
-          </a:prstGeom>
-          <a:solidFill>
-            <a:srgbClr val="1F3864"/>
-          </a:solidFill>
-          <a:ln/>
-        </p:spPr>
-        <p:txBody>
-          <a:bodyPr/>
-          <a:lstStyle/>
-          <a:p>
-            <a:endParaRPr lang="en-US"/>
-          </a:p>
-        </p:txBody>
-      </p:sp>
-      <p:sp>
-        <p:nvSpPr>
-          <p:cNvPr id="3" name="Shape 1"/>
-          <p:cNvSpPr/>
-          <p:nvPr/>
-        </p:nvSpPr>
-        <p:spPr>
-          <a:xfrm>
-            <a:off x="0" y="1051560"/>
-            <a:ext cx="12191695" cy="73152"/>
-          </a:xfrm>
-          <a:prstGeom prst="rect">
-            <a:avLst/>
-          </a:prstGeom>
-          <a:solidFill>
-            <a:srgbClr val="2E5F9E"/>
-          </a:solidFill>
-          <a:ln/>
-        </p:spPr>
-        <p:txBody>
-          <a:bodyPr/>
-          <a:lstStyle/>
-          <a:p>
-            <a:endParaRPr lang="en-US"/>
-          </a:p>
-        </p:txBody>
-      </p:sp>
-      <p:sp>
-        <p:nvSpPr>
-          <p:cNvPr id="4" name="Text 2"/>
-          <p:cNvSpPr/>
-          <p:nvPr/>
-        </p:nvSpPr>
-        <p:spPr>
-          <a:xfrm>
-            <a:off x="548640" y="164592"/>
-            <a:ext cx="10972800" cy="274320"/>
-          </a:xfrm>
-          <a:prstGeom prst="rect">
-            <a:avLst/>
-          </a:prstGeom>
-          <a:noFill/>
-          <a:ln/>
-        </p:spPr>
-        <p:txBody>
-          <a:bodyPr wrap="square" rtlCol="0" anchor="ctr"/>
-          <a:lstStyle/>
-          <a:p>
-            <a:pPr marL="0" indent="0">
-              <a:buNone/>
-            </a:pPr>
-            <a:r>
-              <a:rPr lang="en-US" sz="1100" b="1" kern="0" spc="200" dirty="0">
-                <a:solidFill>
-                  <a:srgbClr val="8FA9D6"/>
-                </a:solidFill>
-              </a:rPr>
-              <a:t>DISTRIBUTION</a:t>
-            </a:r>
-            <a:endParaRPr lang="en-US" sz="1100" dirty="0"/>
-          </a:p>
-        </p:txBody>
-      </p:sp>
-      <p:sp>
-        <p:nvSpPr>
-          <p:cNvPr id="5" name="Text 3"/>
-          <p:cNvSpPr/>
-          <p:nvPr/>
-        </p:nvSpPr>
-        <p:spPr>
-          <a:xfrm>
-            <a:off x="548640" y="384048"/>
-            <a:ext cx="11064240" cy="594360"/>
-          </a:xfrm>
-          <a:prstGeom prst="rect">
-            <a:avLst/>
-          </a:prstGeom>
-          <a:noFill/>
-          <a:ln/>
-        </p:spPr>
-        <p:txBody>
-          <a:bodyPr wrap="square" rtlCol="0" anchor="ctr"/>
-          <a:lstStyle/>
-          <a:p>
-            <a:pPr marL="0" indent="0">
-              <a:buNone/>
-            </a:pPr>
-            <a:r>
-              <a:rPr lang="en-US" sz="2600" b="1" dirty="0">
-                <a:solidFill>
-                  <a:srgbClr val="FFFFFF"/>
-                </a:solidFill>
-              </a:rPr>
-              <a:t>Publishing as an Agency Plugin</a:t>
-            </a:r>
-            <a:endParaRPr lang="en-US" sz="2600" dirty="0"/>
-          </a:p>
-        </p:txBody>
-      </p:sp>
-      <p:sp>
-        <p:nvSpPr>
-          <p:cNvPr id="6" name="Text 4"/>
-          <p:cNvSpPr/>
-          <p:nvPr/>
-        </p:nvSpPr>
-        <p:spPr>
-          <a:xfrm>
-            <a:off x="640080" y="1371600"/>
-            <a:ext cx="10881360" cy="4754880"/>
-          </a:xfrm>
-          <a:prstGeom prst="rect">
-            <a:avLst/>
-          </a:prstGeom>
-          <a:noFill/>
-          <a:ln/>
-        </p:spPr>
-        <p:txBody>
-          <a:bodyPr wrap="square" rtlCol="0" anchor="t"/>
-          <a:lstStyle/>
-          <a:p>
-            <a:pPr marL="190500" indent="-190500">
-              <a:spcAft>
-                <a:spcPts val="800"/>
-              </a:spcAft>
-              <a:buSzPct val="100000"/>
-              <a:buChar char="•"/>
-            </a:pPr>
-            <a:r>
-              <a:rPr lang="en-US" sz="1600" b="1" dirty="0">
-                <a:solidFill>
-                  <a:srgbClr val="1F3864"/>
-                </a:solidFill>
-              </a:rPr>
-              <a:t>Folder layout:  plugin.json  +  agency.json  +  README.md  +  agents/msrc-icm-report.md</a:t>
-            </a:r>
-            <a:endParaRPr lang="en-US" sz="1600" dirty="0"/>
-          </a:p>
-          <a:p>
-            <a:pPr marL="190500" indent="-190500">
-              <a:spcAft>
-                <a:spcPts val="800"/>
-              </a:spcAft>
-              <a:buSzPct val="100000"/>
-              <a:buChar char="•"/>
-            </a:pPr>
-            <a:r>
-              <a:rPr lang="en-US" sz="1600" dirty="0">
-                <a:solidFill>
-                  <a:srgbClr val="333333"/>
-                </a:solidFill>
-              </a:rPr>
-              <a:t>Validate:  agency plugin check ./msrc-icm-report</a:t>
-            </a:r>
-            <a:endParaRPr lang="en-US" sz="1600" dirty="0"/>
-          </a:p>
-          <a:p>
-            <a:pPr marL="190500" indent="-190500">
-              <a:spcAft>
-                <a:spcPts val="800"/>
-              </a:spcAft>
-              <a:buSzPct val="100000"/>
-              <a:buChar char="•"/>
-            </a:pPr>
-            <a:r>
-              <a:rPr lang="en-US" sz="1600" dirty="0">
-                <a:solidFill>
-                  <a:srgbClr val="333333"/>
-                </a:solidFill>
-              </a:rPr>
-              <a:t>Playground: PR the folder into agency-microsoft/playground → plugins/msrc-icm-report/</a:t>
-            </a:r>
-            <a:endParaRPr lang="en-US" sz="1600" dirty="0"/>
-          </a:p>
-          <a:p>
-            <a:pPr marL="190500" indent="-190500">
-              <a:spcAft>
-                <a:spcPts val="800"/>
-              </a:spcAft>
-              <a:buSzPct val="100000"/>
-              <a:buChar char="•"/>
-            </a:pPr>
-            <a:r>
-              <a:rPr lang="en-US" sz="1600" dirty="0">
-                <a:solidFill>
-                  <a:srgbClr val="333333"/>
-                </a:solidFill>
-              </a:rPr>
-              <a:t>Install after merge:  market:msrc-icm-report@playground</a:t>
-            </a:r>
-            <a:endParaRPr lang="en-US" sz="1600" dirty="0"/>
-          </a:p>
-          <a:p>
-            <a:pPr marL="190500" indent="-190500">
-              <a:spcAft>
-                <a:spcPts val="800"/>
-              </a:spcAft>
-              <a:buSzPct val="100000"/>
-              <a:buChar char="•"/>
-            </a:pPr>
-            <a:r>
-              <a:rPr lang="en-US" sz="1600" dirty="0">
-                <a:solidFill>
-                  <a:srgbClr val="333333"/>
-                </a:solidFill>
-              </a:rPr>
-              <a:t>Promote to curated (production/SLA) via the Plugin Submission issue flow: aka.ms/agency/publish-plugin</a:t>
-            </a:r>
-            <a:endParaRPr lang="en-US" sz="1600" dirty="0"/>
           </a:p>
         </p:txBody>
       </p:sp>
